--- a/experiment/Human_Immune_System_Presentation.pptx
+++ b/experiment/Human_Immune_System_Presentation.pptx
@@ -3157,7 +3157,7 @@
               </a:defRPr>
             </a:pPr>
             <a:r>
-              <a:t>INTRODUCTION</a:t>
+              <a:t>TITLE SLIDE</a:t>
             </a:r>
           </a:p>
           <a:p>
@@ -3170,7 +3170,7 @@
               </a:defRPr>
             </a:pPr>
             <a:r>
-              <a:t>THE HUMAN IMMUNE SYSTEM: HOW OUR BODY FIGHTS DISEASES</a:t>
+              <a:t>THE HUMAN IMMUNE SYSTEM</a:t>
             </a:r>
           </a:p>
           <a:p>
@@ -3186,7 +3186,7 @@
               </a:defRPr>
             </a:pPr>
             <a:r>
-              <a:t>A comprehensive exploration of your body's defense mechanisms</a:t>
+              <a:t>How Our Body Fights Diseases</a:t>
             </a:r>
           </a:p>
         </p:txBody>
@@ -3248,7 +3248,7 @@
               </a:defRPr>
             </a:pPr>
             <a:r>
-              <a:t>ADVANCED DEFENSE SYSTEMS</a:t>
+              <a:t>SECONDARY RESPONSE</a:t>
             </a:r>
           </a:p>
         </p:txBody>
@@ -3284,7 +3284,7 @@
               </a:defRPr>
             </a:pPr>
             <a:r>
-              <a:t>The Complement System</a:t>
+              <a:t>Inflammation &amp; Complement System</a:t>
             </a:r>
           </a:p>
         </p:txBody>
@@ -3323,7 +3323,7 @@
               </a:defRPr>
             </a:pPr>
             <a:r>
-              <a:t>• Group of blood proteins enhancing immune response</a:t>
+              <a:t>• Inflammatory response: Redness, heat, swelling, pain</a:t>
             </a:r>
           </a:p>
           <a:p>
@@ -3339,7 +3339,7 @@
               </a:defRPr>
             </a:pPr>
             <a:r>
-              <a:t>• Cascade activation: Sequential protein activation</a:t>
+              <a:t>• Complement proteins cascade to destroy pathogens</a:t>
             </a:r>
           </a:p>
           <a:p>
@@ -3355,7 +3355,7 @@
               </a:defRPr>
             </a:pPr>
             <a:r>
-              <a:t>• Functions: Mark pathogens, create inflammation, lyse cells</a:t>
+              <a:t>• Membrane attack complex creates pores in pathogens</a:t>
             </a:r>
           </a:p>
           <a:p>
@@ -3371,14 +3371,14 @@
               </a:defRPr>
             </a:pPr>
             <a:r>
-              <a:t>• Bridges innate and adaptive immunity</a:t>
+              <a:t>• Promotes tissue repair and healing processes</a:t>
             </a:r>
           </a:p>
         </p:txBody>
       </p:sp>
       <p:pic>
         <p:nvPicPr>
-          <p:cNvPr id="5" name="Picture 4" descr="slide10_complement.png"/>
+          <p:cNvPr id="5" name="Picture 4" descr="slide9_inflammation_complement.png"/>
           <p:cNvPicPr>
             <a:picLocks noChangeAspect="1"/>
           </p:cNvPicPr>
@@ -3457,7 +3457,7 @@
               </a:defRPr>
             </a:pPr>
             <a:r>
-              <a:t>IMMUNE CHALLENGES</a:t>
+              <a:t>PREVENTION &amp; SUPPORT</a:t>
             </a:r>
           </a:p>
         </p:txBody>
@@ -3493,7 +3493,7 @@
               </a:defRPr>
             </a:pPr>
             <a:r>
-              <a:t>When Immunity Fails: Immune Disorders</a:t>
+              <a:t>Supporting Your Immune Health</a:t>
             </a:r>
           </a:p>
         </p:txBody>
@@ -3532,7 +3532,7 @@
               </a:defRPr>
             </a:pPr>
             <a:r>
-              <a:t>• Autoimmune Diseases: Immune system attacks self (lupus, rheumatoid arthritis)</a:t>
+              <a:t>• Adequate sleep: Essential for immune cell production</a:t>
             </a:r>
           </a:p>
           <a:p>
@@ -3548,7 +3548,7 @@
               </a:defRPr>
             </a:pPr>
             <a:r>
-              <a:t>• Immunodeficiency: Weak immune response (HIV/AIDS, primary immunodeficiency)</a:t>
+              <a:t>• Balanced nutrition: Vitamins, minerals, proteins</a:t>
             </a:r>
           </a:p>
           <a:p>
@@ -3564,7 +3564,7 @@
               </a:defRPr>
             </a:pPr>
             <a:r>
-              <a:t>• Allergies: Excessive immune response to harmless substances</a:t>
+              <a:t>• Regular exercise: Enhances circulation and immunity</a:t>
             </a:r>
           </a:p>
           <a:p>
@@ -3580,14 +3580,14 @@
               </a:defRPr>
             </a:pPr>
             <a:r>
-              <a:t>• Modern treatments: Monoclonal antibodies, CAR-T cell therapy</a:t>
+              <a:t>• Vaccination: Trains immune system safely</a:t>
             </a:r>
           </a:p>
         </p:txBody>
       </p:sp>
       <p:pic>
         <p:nvPicPr>
-          <p:cNvPr id="5" name="Picture 4" descr="slide11_immune_disorders.png"/>
+          <p:cNvPr id="5" name="Picture 4" descr="slide10_immune_health.png"/>
           <p:cNvPicPr>
             <a:picLocks noChangeAspect="1"/>
           </p:cNvPicPr>
@@ -3701,7 +3701,7 @@
               </a:defRPr>
             </a:pPr>
             <a:r>
-              <a:t>• Your immune system is a sophisticated, multi-layered defense network</a:t>
+              <a:t>• The immune system is a sophisticated multi-layered defense network</a:t>
             </a:r>
           </a:p>
           <a:p>
@@ -3717,7 +3717,7 @@
               </a:defRPr>
             </a:pPr>
             <a:r>
-              <a:t>• Innate and adaptive immunity work together seamlessly</a:t>
+              <a:t>• Innate and adaptive immunity work synergistically</a:t>
             </a:r>
           </a:p>
           <a:p>
@@ -3733,7 +3733,7 @@
               </a:defRPr>
             </a:pPr>
             <a:r>
-              <a:t>• Healthy lifestyle supports optimal immune function</a:t>
+              <a:t>• Understanding immunity helps us support our health</a:t>
             </a:r>
           </a:p>
           <a:p>
@@ -3749,7 +3749,7 @@
               </a:defRPr>
             </a:pPr>
             <a:r>
-              <a:t>• Ongoing research continues to improve immune-based therapies</a:t>
+              <a:t>• Vaccination harnesses adaptive immunity for disease prevention</a:t>
             </a:r>
           </a:p>
         </p:txBody>
@@ -3882,7 +3882,7 @@
               </a:defRPr>
             </a:pPr>
             <a:r>
-              <a:t>IMMUNE SYSTEM FUNDAMENTALS</a:t>
+              <a:t>INTRODUCTION</a:t>
             </a:r>
           </a:p>
         </p:txBody>
@@ -3957,7 +3957,7 @@
               </a:defRPr>
             </a:pPr>
             <a:r>
-              <a:t>• A complex network of organs, cells, proteins, and chemicals</a:t>
+              <a:t>• A complex network of organs, cells, and proteins</a:t>
             </a:r>
           </a:p>
           <a:p>
@@ -3973,7 +3973,7 @@
               </a:defRPr>
             </a:pPr>
             <a:r>
-              <a:t>• Primary function: Protect the body from pathogens and invaders</a:t>
+              <a:t>• Defends against harmful invaders: bacteria, viruses, fungi, parasites</a:t>
             </a:r>
           </a:p>
           <a:p>
@@ -3989,7 +3989,7 @@
               </a:defRPr>
             </a:pPr>
             <a:r>
-              <a:t>• Distinguishes between self and non-self</a:t>
+              <a:t>• Maintains internal balance and promotes tissue healing</a:t>
             </a:r>
           </a:p>
           <a:p>
@@ -4005,14 +4005,14 @@
               </a:defRPr>
             </a:pPr>
             <a:r>
-              <a:t>• Supports healing and tissue repair</a:t>
+              <a:t>• Distinguishes between self and non-self entities</a:t>
             </a:r>
           </a:p>
         </p:txBody>
       </p:sp>
       <p:pic>
         <p:nvPicPr>
-          <p:cNvPr id="5" name="Picture 4" descr="slide2_immune_overview.png"/>
+          <p:cNvPr id="5" name="Picture 4" descr="slide2_immune_system_overview.png"/>
           <p:cNvPicPr>
             <a:picLocks noChangeAspect="1"/>
           </p:cNvPicPr>
@@ -4091,7 +4091,7 @@
               </a:defRPr>
             </a:pPr>
             <a:r>
-              <a:t>IMMUNE SYSTEM FUNDAMENTALS</a:t>
+              <a:t>SYSTEM OVERVIEW</a:t>
             </a:r>
           </a:p>
         </p:txBody>
@@ -4127,7 +4127,7 @@
               </a:defRPr>
             </a:pPr>
             <a:r>
-              <a:t>Two Lines of Defense</a:t>
+              <a:t>Two-Tier Defense System</a:t>
             </a:r>
           </a:p>
         </p:txBody>
@@ -4141,7 +4141,7 @@
         <p:spPr>
           <a:xfrm>
             <a:off x="685800" y="1645920"/>
-            <a:ext cx="5029200" cy="4114800"/>
+            <a:ext cx="5486400" cy="4114800"/>
           </a:xfrm>
           <a:prstGeom prst="rect">
             <a:avLst/>
@@ -4166,7 +4166,7 @@
               </a:defRPr>
             </a:pPr>
             <a:r>
-              <a:t>• Innate Immunity: Rapid, non-specific, first responder</a:t>
+              <a:t>• Innate Immunity: Rapid, non-specific response</a:t>
             </a:r>
           </a:p>
           <a:p>
@@ -4182,7 +4182,7 @@
               </a:defRPr>
             </a:pPr>
             <a:r>
-              <a:t>• Adaptive Immunity: Specific, slower, long-lasting memory</a:t>
+              <a:t>• Adaptive Immunity: Targeted, specific response</a:t>
             </a:r>
           </a:p>
           <a:p>
@@ -4198,7 +4198,7 @@
               </a:defRPr>
             </a:pPr>
             <a:r>
-              <a:t>• Both systems work together in coordinated defense</a:t>
+              <a:t>• Both systems work together for comprehensive protection</a:t>
             </a:r>
           </a:p>
           <a:p>
@@ -4214,35 +4214,82 @@
               </a:defRPr>
             </a:pPr>
             <a:r>
-              <a:t>• Together they provide comprehensive protection</a:t>
-            </a:r>
-          </a:p>
-        </p:txBody>
-      </p:sp>
-      <p:pic>
-        <p:nvPicPr>
-          <p:cNvPr id="5" name="Picture 4" descr="slide3_innate_vs_adaptive.png"/>
-          <p:cNvPicPr>
-            <a:picLocks noChangeAspect="1"/>
-          </p:cNvPicPr>
+              <a:t>• Previous infections enhance adaptive responses</a:t>
+            </a:r>
+          </a:p>
+        </p:txBody>
+      </p:sp>
+      <p:sp>
+        <p:nvSpPr>
+          <p:cNvPr id="5" name="Rounded Rectangle 4"/>
+          <p:cNvSpPr/>
           <p:nvPr/>
-        </p:nvPicPr>
-        <p:blipFill>
-          <a:blip r:embed="rId2"/>
-          <a:stretch>
-            <a:fillRect/>
-          </a:stretch>
-        </p:blipFill>
-        <p:spPr>
-          <a:xfrm>
-            <a:off x="6172200" y="1645920"/>
-            <a:ext cx="5333695" cy="3474720"/>
-          </a:xfrm>
-          <a:prstGeom prst="rect">
+        </p:nvSpPr>
+        <p:spPr>
+          <a:xfrm>
+            <a:off x="6858000" y="1645920"/>
+            <a:ext cx="4647895" cy="4114800"/>
+          </a:xfrm>
+          <a:prstGeom prst="roundRect">
             <a:avLst/>
           </a:prstGeom>
-        </p:spPr>
-      </p:pic>
+          <a:solidFill>
+            <a:srgbClr val="161E31"/>
+          </a:solidFill>
+          <a:ln w="19050">
+            <a:solidFill>
+              <a:srgbClr val="283757"/>
+            </a:solidFill>
+          </a:ln>
+        </p:spPr>
+        <p:style>
+          <a:lnRef idx="1">
+            <a:schemeClr val="accent1"/>
+          </a:lnRef>
+          <a:fillRef idx="3">
+            <a:schemeClr val="accent1"/>
+          </a:fillRef>
+          <a:effectRef idx="2">
+            <a:schemeClr val="accent1"/>
+          </a:effectRef>
+          <a:fontRef idx="minor">
+            <a:schemeClr val="lt1"/>
+          </a:fontRef>
+        </p:style>
+        <p:txBody>
+          <a:bodyPr rtlCol="0" anchor="ctr" wrap="square" lIns="182880" rIns="182880" tIns="182880" bIns="182880"/>
+          <a:lstStyle/>
+          <a:p>
+            <a:pPr algn="ctr">
+              <a:spcAft>
+                <a:spcPts val="1000"/>
+              </a:spcAft>
+              <a:defRPr sz="1400" b="1">
+                <a:solidFill>
+                  <a:srgbClr val="8A2BE2"/>
+                </a:solidFill>
+                <a:latin typeface="Arial"/>
+              </a:defRPr>
+            </a:pPr>
+            <a:r>
+              <a:t>Key Insight:</a:t>
+            </a:r>
+          </a:p>
+          <a:p>
+            <a:pPr>
+              <a:defRPr sz="1100">
+                <a:solidFill>
+                  <a:srgbClr val="94A3B8"/>
+                </a:solidFill>
+                <a:latin typeface="Arial"/>
+              </a:defRPr>
+            </a:pPr>
+            <a:r>
+              <a:t>This slide covers 'Two-Tier Defense System' in context of The Human Immune System: How Our Body Fights Diseases. Focus on discussing design boundaries and parameters during lecture.</a:t>
+            </a:r>
+          </a:p>
+        </p:txBody>
+      </p:sp>
     </p:spTree>
   </p:cSld>
   <p:clrMapOvr>
@@ -4300,7 +4347,7 @@
               </a:defRPr>
             </a:pPr>
             <a:r>
-              <a:t>IMMUNE DEFENSE MECHANISMS</a:t>
+              <a:t>FIRST LINE OF DEFENSE</a:t>
             </a:r>
           </a:p>
         </p:txBody>
@@ -4336,7 +4383,7 @@
               </a:defRPr>
             </a:pPr>
             <a:r>
-              <a:t>Innate Immunity: First Line of Defense</a:t>
+              <a:t>Physical &amp; Chemical Barriers</a:t>
             </a:r>
           </a:p>
         </p:txBody>
@@ -4375,7 +4422,7 @@
               </a:defRPr>
             </a:pPr>
             <a:r>
-              <a:t>• Physical barriers: Skin, mucous membranes, stomach acid</a:t>
+              <a:t>• Skin: Protective barrier and microbiome</a:t>
             </a:r>
           </a:p>
           <a:p>
@@ -4391,7 +4438,7 @@
               </a:defRPr>
             </a:pPr>
             <a:r>
-              <a:t>• Immediate response to any pathogen</a:t>
+              <a:t>• Mucus membranes: Line respiratory and digestive tracts</a:t>
             </a:r>
           </a:p>
           <a:p>
@@ -4407,7 +4454,7 @@
               </a:defRPr>
             </a:pPr>
             <a:r>
-              <a:t>• Non-specific recognition of foreign invaders</a:t>
+              <a:t>• Stomach acid: Kills many ingested pathogens</a:t>
             </a:r>
           </a:p>
           <a:p>
@@ -4423,14 +4470,14 @@
               </a:defRPr>
             </a:pPr>
             <a:r>
-              <a:t>• Includes inflammation and fever responses</a:t>
+              <a:t>• Tears &amp; saliva: Contain antimicrobial proteins</a:t>
             </a:r>
           </a:p>
         </p:txBody>
       </p:sp>
       <p:pic>
         <p:nvPicPr>
-          <p:cNvPr id="5" name="Picture 4" descr="slide4_innate_immunity.png"/>
+          <p:cNvPr id="5" name="Picture 4" descr="slide3_barriers.png"/>
           <p:cNvPicPr>
             <a:picLocks noChangeAspect="1"/>
           </p:cNvPicPr>
@@ -4509,7 +4556,7 @@
               </a:defRPr>
             </a:pPr>
             <a:r>
-              <a:t>IMMUNE DEFENSE MECHANISMS</a:t>
+              <a:t>INNATE IMMUNITY</a:t>
             </a:r>
           </a:p>
         </p:txBody>
@@ -4545,7 +4592,7 @@
               </a:defRPr>
             </a:pPr>
             <a:r>
-              <a:t>Adaptive Immunity: Specific Defense</a:t>
+              <a:t>Non-Specific Defense Mechanisms</a:t>
             </a:r>
           </a:p>
         </p:txBody>
@@ -4584,7 +4631,7 @@
               </a:defRPr>
             </a:pPr>
             <a:r>
-              <a:t>• Highly specific recognition of particular pathogens</a:t>
+              <a:t>• Immediate response without prior exposure</a:t>
             </a:r>
           </a:p>
           <a:p>
@@ -4600,7 +4647,7 @@
               </a:defRPr>
             </a:pPr>
             <a:r>
-              <a:t>• Develops memory of encountered pathogens</a:t>
+              <a:t>• Phagocytes engulf and destroy pathogens</a:t>
             </a:r>
           </a:p>
           <a:p>
@@ -4616,7 +4663,7 @@
               </a:defRPr>
             </a:pPr>
             <a:r>
-              <a:t>• Faster response on re-exposure (vaccination principle)</a:t>
+              <a:t>• Natural killer cells eliminate infected cells</a:t>
             </a:r>
           </a:p>
           <a:p>
@@ -4632,14 +4679,14 @@
               </a:defRPr>
             </a:pPr>
             <a:r>
-              <a:t>• Primary and secondary immune responses</a:t>
+              <a:t>• Complement system marks pathogens for destruction</a:t>
             </a:r>
           </a:p>
         </p:txBody>
       </p:sp>
       <p:pic>
         <p:nvPicPr>
-          <p:cNvPr id="5" name="Picture 4" descr="slide5_adaptive_immunity.png"/>
+          <p:cNvPr id="5" name="Picture 4" descr="slide4_innate_immunity.png"/>
           <p:cNvPicPr>
             <a:picLocks noChangeAspect="1"/>
           </p:cNvPicPr>
@@ -4718,7 +4765,7 @@
               </a:defRPr>
             </a:pPr>
             <a:r>
-              <a:t>CELLULAR IMMUNITY</a:t>
+              <a:t>IMMUNE CELLS</a:t>
             </a:r>
           </a:p>
         </p:txBody>
@@ -4754,7 +4801,7 @@
               </a:defRPr>
             </a:pPr>
             <a:r>
-              <a:t>Key Immune Cells: White Blood Cells</a:t>
+              <a:t>Key Players: White Blood Cells</a:t>
             </a:r>
           </a:p>
         </p:txBody>
@@ -4809,7 +4856,7 @@
               </a:defRPr>
             </a:pPr>
             <a:r>
-              <a:t>• Lymphocytes: B cells and T cells for specific immunity</a:t>
+              <a:t>• Macrophages: "Eat" pathogens and present antigens</a:t>
             </a:r>
           </a:p>
           <a:p>
@@ -4825,7 +4872,7 @@
               </a:defRPr>
             </a:pPr>
             <a:r>
-              <a:t>• Monocytes/Macrophages: Engulf and destroy pathogens</a:t>
+              <a:t>• Lymphocytes: B cells and T cells for adaptive response</a:t>
             </a:r>
           </a:p>
           <a:p>
@@ -4841,14 +4888,14 @@
               </a:defRPr>
             </a:pPr>
             <a:r>
-              <a:t>• Eosinophils &amp; Basophils: Combat parasites and allergies</a:t>
+              <a:t>• Dendritic cells: Bridge between innate and adaptive immunity</a:t>
             </a:r>
           </a:p>
         </p:txBody>
       </p:sp>
       <p:pic>
         <p:nvPicPr>
-          <p:cNvPr id="5" name="Picture 4" descr="slide6_immune_cells.png"/>
+          <p:cNvPr id="5" name="Picture 4" descr="slide5_immune_cells.png"/>
           <p:cNvPicPr>
             <a:picLocks noChangeAspect="1"/>
           </p:cNvPicPr>
@@ -4927,7 +4974,7 @@
               </a:defRPr>
             </a:pPr>
             <a:r>
-              <a:t>CELLULAR IMMUNITY</a:t>
+              <a:t>ADAPTIVE IMMUNITY</a:t>
             </a:r>
           </a:p>
         </p:txBody>
@@ -4963,7 +5010,7 @@
               </a:defRPr>
             </a:pPr>
             <a:r>
-              <a:t>Lymphocytes: B Cells and T Cells</a:t>
+              <a:t>Specific &amp; Targeted Defense</a:t>
             </a:r>
           </a:p>
         </p:txBody>
@@ -5002,7 +5049,7 @@
               </a:defRPr>
             </a:pPr>
             <a:r>
-              <a:t>• B Cells: Produce antibodies for humoral immunity</a:t>
+              <a:t>• Develops over time with exposure to pathogens</a:t>
             </a:r>
           </a:p>
           <a:p>
@@ -5018,7 +5065,7 @@
               </a:defRPr>
             </a:pPr>
             <a:r>
-              <a:t>• T Helper Cells: Coordinate immune response</a:t>
+              <a:t>• Creates memory of specific antigens</a:t>
             </a:r>
           </a:p>
           <a:p>
@@ -5034,7 +5081,7 @@
               </a:defRPr>
             </a:pPr>
             <a:r>
-              <a:t>• Cytotoxic T Cells: Kill infected or abnormal cells</a:t>
+              <a:t>• Faster and stronger response on re-exposure</a:t>
             </a:r>
           </a:p>
           <a:p>
@@ -5050,14 +5097,14 @@
               </a:defRPr>
             </a:pPr>
             <a:r>
-              <a:t>• Regulatory T Cells: Prevent excessive immune response</a:t>
+              <a:t>• Foundation for vaccination effectiveness</a:t>
             </a:r>
           </a:p>
         </p:txBody>
       </p:sp>
       <p:pic>
         <p:nvPicPr>
-          <p:cNvPr id="5" name="Picture 4" descr="slide7_lymphocytes.png"/>
+          <p:cNvPr id="5" name="Picture 4" descr="slide6_adaptive_immunity.png"/>
           <p:cNvPicPr>
             <a:picLocks noChangeAspect="1"/>
           </p:cNvPicPr>
@@ -5136,7 +5183,7 @@
               </a:defRPr>
             </a:pPr>
             <a:r>
-              <a:t>MOLECULAR IMMUNITY</a:t>
+              <a:t>HUMORAL IMMUNITY</a:t>
             </a:r>
           </a:p>
         </p:txBody>
@@ -5172,7 +5219,7 @@
               </a:defRPr>
             </a:pPr>
             <a:r>
-              <a:t>Antibodies and Antigens</a:t>
+              <a:t>B Cells &amp; Antibody Production</a:t>
             </a:r>
           </a:p>
         </p:txBody>
@@ -5211,7 +5258,7 @@
               </a:defRPr>
             </a:pPr>
             <a:r>
-              <a:t>• Antibodies: Y-shaped proteins produced by B cells</a:t>
+              <a:t>• B cells recognize specific antigens</a:t>
             </a:r>
           </a:p>
           <a:p>
@@ -5227,7 +5274,7 @@
               </a:defRPr>
             </a:pPr>
             <a:r>
-              <a:t>• Antigens: Foreign molecules that trigger immune response</a:t>
+              <a:t>• Differentiate into plasma cells producing antibodies</a:t>
             </a:r>
           </a:p>
           <a:p>
@@ -5243,7 +5290,7 @@
               </a:defRPr>
             </a:pPr>
             <a:r>
-              <a:t>• Specific binding: Each antibody recognizes specific antigen</a:t>
+              <a:t>• Antibodies neutralize or mark pathogens</a:t>
             </a:r>
           </a:p>
           <a:p>
@@ -5259,14 +5306,14 @@
               </a:defRPr>
             </a:pPr>
             <a:r>
-              <a:t>• Functions: Neutralization, opsonization, complement activation</a:t>
+              <a:t>• Memory B cells provide long-term immunity</a:t>
             </a:r>
           </a:p>
         </p:txBody>
       </p:sp>
       <p:pic>
         <p:nvPicPr>
-          <p:cNvPr id="5" name="Picture 4" descr="slide8_antibodies.png"/>
+          <p:cNvPr id="5" name="Picture 4" descr="slide7_b_cells_antibodies.png"/>
           <p:cNvPicPr>
             <a:picLocks noChangeAspect="1"/>
           </p:cNvPicPr>
@@ -5345,7 +5392,7 @@
               </a:defRPr>
             </a:pPr>
             <a:r>
-              <a:t>IMMUNE SYSTEM ORGANIZATION</a:t>
+              <a:t>CELL-MEDIATED IMMUNITY</a:t>
             </a:r>
           </a:p>
         </p:txBody>
@@ -5381,7 +5428,7 @@
               </a:defRPr>
             </a:pPr>
             <a:r>
-              <a:t>Immune System Organs</a:t>
+              <a:t>T Cell Functions &amp; Responses</a:t>
             </a:r>
           </a:p>
         </p:txBody>
@@ -5420,7 +5467,7 @@
               </a:defRPr>
             </a:pPr>
             <a:r>
-              <a:t>• Primary organs: Bone marrow and thymus (cell production/maturation)</a:t>
+              <a:t>• Helper T cells (CD4+): Coordinate immune response</a:t>
             </a:r>
           </a:p>
           <a:p>
@@ -5436,7 +5483,7 @@
               </a:defRPr>
             </a:pPr>
             <a:r>
-              <a:t>• Secondary organs: Lymph nodes, spleen (immune response sites)</a:t>
+              <a:t>• Cytotoxic T cells (CD8+): Kill infected cells</a:t>
             </a:r>
           </a:p>
           <a:p>
@@ -5452,7 +5499,7 @@
               </a:defRPr>
             </a:pPr>
             <a:r>
-              <a:t>• Lymphatic vessels: Transport immune cells throughout body</a:t>
+              <a:t>• Regulatory T cells: Prevent overreaction</a:t>
             </a:r>
           </a:p>
           <a:p>
@@ -5468,14 +5515,14 @@
               </a:defRPr>
             </a:pPr>
             <a:r>
-              <a:t>• Gut-associated lymphoid tissue: MALT, tonsils, appendix</a:t>
+              <a:t>• T cell memory enables rapid re-response</a:t>
             </a:r>
           </a:p>
         </p:txBody>
       </p:sp>
       <p:pic>
         <p:nvPicPr>
-          <p:cNvPr id="5" name="Picture 4" descr="slide9_immune_organs.png"/>
+          <p:cNvPr id="5" name="Picture 4" descr="slide8_t_cells.png"/>
           <p:cNvPicPr>
             <a:picLocks noChangeAspect="1"/>
           </p:cNvPicPr>
